--- a/ML Adv/31 - Docker nets & compose/Presentation/31 - Docker nets & compose.pptx
+++ b/ML Adv/31 - Docker nets & compose/Presentation/31 - Docker nets & compose.pptx
@@ -5793,7 +5793,7 @@
           <a:p>
             <a:fld id="{1D8BD707-D9CF-40AE-B4C6-C98DA3205C09}" type="datetimeFigureOut">
               <a:rPr lang="en-US"/>
-              <a:t>5/15/25</a:t>
+              <a:t>7/8/25</a:t>
             </a:fld>
             <a:endParaRPr lang="en-US"/>
           </a:p>
@@ -20526,12 +20526,8 @@
           <a:p>
             <a:pPr marL="0" indent="0"/>
             <a:r>
-              <a:rPr lang="en-US" dirty="0"/>
-              <a:t>03.09 - </a:t>
-            </a:r>
-            <a:r>
               <a:rPr lang="ru-RU" dirty="0" err="1"/>
-              <a:t>деплой</a:t>
+              <a:t>Деплой</a:t>
             </a:r>
             <a:r>
               <a:rPr lang="ru-RU" dirty="0"/>

--- a/ML Adv/31 - Docker nets & compose/Presentation/31 - Docker nets & compose.pptx
+++ b/ML Adv/31 - Docker nets & compose/Presentation/31 - Docker nets & compose.pptx
@@ -5793,7 +5793,7 @@
           <a:p>
             <a:fld id="{1D8BD707-D9CF-40AE-B4C6-C98DA3205C09}" type="datetimeFigureOut">
               <a:rPr lang="en-US"/>
-              <a:t>7/8/25</a:t>
+              <a:t>10/24/25</a:t>
             </a:fld>
             <a:endParaRPr lang="en-US"/>
           </a:p>
@@ -24480,15 +24480,7 @@
           <p:nvPr/>
         </p:nvPicPr>
         <p:blipFill>
-          <a:blip r:embed="rId7">
-            <a:duotone>
-              <a:schemeClr val="bg2">
-                <a:shade val="45000"/>
-                <a:satMod val="135000"/>
-              </a:schemeClr>
-              <a:prstClr val="white"/>
-            </a:duotone>
-          </a:blip>
+          <a:blip r:embed="rId7"/>
           <a:srcRect t="2849" b="2849"/>
           <a:stretch/>
         </p:blipFill>
@@ -24684,63 +24676,6 @@
               <a:t>Программа курса</a:t>
             </a:r>
             <a:endParaRPr dirty="0"/>
-          </a:p>
-        </p:txBody>
-      </p:sp>
-      <p:sp>
-        <p:nvSpPr>
-          <p:cNvPr id="271" name="Google Shape;271;p44"/>
-          <p:cNvSpPr/>
-          <p:nvPr/>
-        </p:nvSpPr>
-        <p:spPr>
-          <a:xfrm>
-            <a:off x="500550" y="1104419"/>
-            <a:ext cx="2612467" cy="579300"/>
-          </a:xfrm>
-          <a:prstGeom prst="roundRect">
-            <a:avLst>
-              <a:gd name="adj" fmla="val 16667"/>
-            </a:avLst>
-          </a:prstGeom>
-          <a:solidFill>
-            <a:srgbClr val="FFD966"/>
-          </a:solidFill>
-          <a:ln>
-            <a:noFill/>
-          </a:ln>
-          <a:effectLst>
-            <a:glow rad="139700">
-              <a:schemeClr val="accent1">
-                <a:satMod val="175000"/>
-                <a:alpha val="40000"/>
-              </a:schemeClr>
-            </a:glow>
-          </a:effectLst>
-        </p:spPr>
-        <p:txBody>
-          <a:bodyPr spcFirstLastPara="1" wrap="square" lIns="162000" tIns="91425" rIns="162000" bIns="91425" anchor="ctr" anchorCtr="0">
-            <a:noAutofit/>
-          </a:bodyPr>
-          <a:lstStyle/>
-          <a:p>
-            <a:r>
-              <a:rPr lang="en-US" sz="1600" dirty="0">
-                <a:solidFill>
-                  <a:srgbClr val="1F1F1F"/>
-                </a:solidFill>
-                <a:latin typeface="Google Sans"/>
-                <a:sym typeface="Roboto"/>
-              </a:rPr>
-              <a:t>Production</a:t>
-            </a:r>
-            <a:endParaRPr sz="1600" dirty="0">
-              <a:solidFill>
-                <a:srgbClr val="1F1F1F"/>
-              </a:solidFill>
-              <a:latin typeface="Google Sans"/>
-              <a:sym typeface="Roboto"/>
-            </a:endParaRPr>
           </a:p>
         </p:txBody>
       </p:sp>
@@ -26074,6 +26009,116 @@
           </a:fontRef>
         </p:style>
       </p:cxnSp>
+      <p:grpSp>
+        <p:nvGrpSpPr>
+          <p:cNvPr id="2" name="Group 1">
+            <a:extLst>
+              <a:ext uri="{FF2B5EF4-FFF2-40B4-BE49-F238E27FC236}">
+                <a16:creationId xmlns:a16="http://schemas.microsoft.com/office/drawing/2014/main" id="{BF9BB969-2441-DF42-B3EC-1E4856CE5CA5}"/>
+              </a:ext>
+            </a:extLst>
+          </p:cNvPr>
+          <p:cNvGrpSpPr/>
+          <p:nvPr/>
+        </p:nvGrpSpPr>
+        <p:grpSpPr>
+          <a:xfrm>
+            <a:off x="500550" y="1104419"/>
+            <a:ext cx="2612467" cy="579300"/>
+            <a:chOff x="500550" y="1104419"/>
+            <a:chExt cx="2612467" cy="579300"/>
+          </a:xfrm>
+        </p:grpSpPr>
+        <p:sp>
+          <p:nvSpPr>
+            <p:cNvPr id="271" name="Google Shape;271;p44"/>
+            <p:cNvSpPr/>
+            <p:nvPr/>
+          </p:nvSpPr>
+          <p:spPr>
+            <a:xfrm>
+              <a:off x="500550" y="1104419"/>
+              <a:ext cx="2612467" cy="579300"/>
+            </a:xfrm>
+            <a:prstGeom prst="roundRect">
+              <a:avLst>
+                <a:gd name="adj" fmla="val 16667"/>
+              </a:avLst>
+            </a:prstGeom>
+            <a:solidFill>
+              <a:srgbClr val="FFD966"/>
+            </a:solidFill>
+            <a:ln>
+              <a:noFill/>
+            </a:ln>
+            <a:effectLst>
+              <a:glow rad="139700">
+                <a:schemeClr val="accent1">
+                  <a:satMod val="175000"/>
+                  <a:alpha val="40000"/>
+                </a:schemeClr>
+              </a:glow>
+            </a:effectLst>
+          </p:spPr>
+          <p:txBody>
+            <a:bodyPr spcFirstLastPara="1" wrap="square" lIns="162000" tIns="91425" rIns="162000" bIns="91425" anchor="ctr" anchorCtr="0">
+              <a:noAutofit/>
+            </a:bodyPr>
+            <a:lstStyle/>
+            <a:p>
+              <a:pPr marL="444500"/>
+              <a:r>
+                <a:rPr lang="en-US" sz="1600" dirty="0">
+                  <a:solidFill>
+                    <a:srgbClr val="1F1F1F"/>
+                  </a:solidFill>
+                  <a:latin typeface="Google Sans"/>
+                  <a:sym typeface="Roboto"/>
+                </a:rPr>
+                <a:t>Production</a:t>
+              </a:r>
+              <a:endParaRPr sz="1600" dirty="0">
+                <a:solidFill>
+                  <a:srgbClr val="1F1F1F"/>
+                </a:solidFill>
+                <a:latin typeface="Google Sans"/>
+                <a:sym typeface="Roboto"/>
+              </a:endParaRPr>
+            </a:p>
+          </p:txBody>
+        </p:sp>
+        <p:pic>
+          <p:nvPicPr>
+            <p:cNvPr id="21" name="Google Shape;225;p40">
+              <a:extLst>
+                <a:ext uri="{FF2B5EF4-FFF2-40B4-BE49-F238E27FC236}">
+                  <a16:creationId xmlns:a16="http://schemas.microsoft.com/office/drawing/2014/main" id="{B958DEED-2BE4-6A49-8586-4343A146FA28}"/>
+                </a:ext>
+              </a:extLst>
+            </p:cNvPr>
+            <p:cNvPicPr preferRelativeResize="0"/>
+            <p:nvPr/>
+          </p:nvPicPr>
+          <p:blipFill>
+            <a:blip r:embed="rId3"/>
+            <a:srcRect t="2849" b="2849"/>
+            <a:stretch/>
+          </p:blipFill>
+          <p:spPr>
+            <a:xfrm>
+              <a:off x="625928" y="1206788"/>
+              <a:ext cx="419930" cy="396001"/>
+            </a:xfrm>
+            <a:prstGeom prst="ellipse">
+              <a:avLst/>
+            </a:prstGeom>
+            <a:noFill/>
+            <a:ln>
+              <a:noFill/>
+            </a:ln>
+          </p:spPr>
+        </p:pic>
+      </p:grpSp>
     </p:spTree>
     <p:extLst>
       <p:ext uri="{BB962C8B-B14F-4D97-AF65-F5344CB8AC3E}">
